--- a/schools-presentations/B Gymnasiou/B41M6 - Διαχείριση Υπολογιστικών Φύλλων (2).pptx
+++ b/schools-presentations/B Gymnasiou/B41M6 - Διαχείριση Υπολογιστικών Φύλλων (2).pptx
@@ -5,7 +5,7 @@
     <p:sldMasterId id="2147483648" r:id="rId1"/>
   </p:sldMasterIdLst>
   <p:notesMasterIdLst>
-    <p:notesMasterId r:id="rId10"/>
+    <p:notesMasterId r:id="rId9"/>
   </p:notesMasterIdLst>
   <p:sldIdLst>
     <p:sldId id="256" r:id="rId2"/>
@@ -15,7 +15,6 @@
     <p:sldId id="260" r:id="rId6"/>
     <p:sldId id="261" r:id="rId7"/>
     <p:sldId id="262" r:id="rId8"/>
-    <p:sldId id="263" r:id="rId9"/>
   </p:sldIdLst>
   <p:sldSz cx="12192000" cy="6858000"/>
   <p:notesSz cx="6858000" cy="9144000"/>
@@ -122,20 +121,12 @@
 </p:presentation>
 </file>
 
-<file path=ppt/revisionInfo.xml><?xml version="1.0" encoding="utf-8"?>
-<p1510:revInfo xmlns:a="http://schemas.openxmlformats.org/drawingml/2006/main" xmlns:r="http://schemas.openxmlformats.org/officeDocument/2006/relationships" xmlns:p1510="http://schemas.microsoft.com/office/powerpoint/2015/10/main">
-  <p1510:revLst>
-    <p1510:client id="{462D52F0-F9FB-4CD3-B642-9525B918AF9B}" v="1" dt="2026-09-27T19:10:01.058"/>
-  </p1510:revLst>
-</p1510:revInfo>
-</file>
-
 <file path=ppt/changesInfos/changesInfo1.xml><?xml version="1.0" encoding="utf-8"?>
 <pc:chgInfo xmlns:a="http://schemas.openxmlformats.org/drawingml/2006/main" xmlns:r="http://schemas.openxmlformats.org/officeDocument/2006/relationships" xmlns:ac="http://schemas.microsoft.com/office/drawing/2013/main/command" xmlns:pc="http://schemas.microsoft.com/office/powerpoint/2013/main/command">
   <pc:docChgLst>
     <pc:chgData name="Άριστος Αρέστη" userId="813aa191-2d4c-464f-9d05-0a7e494d859f" providerId="ADAL" clId="{49C7B61D-1ACF-4AFF-A04E-A3B433E32474}"/>
-    <pc:docChg chg="custSel modSld">
-      <pc:chgData name="Άριστος Αρέστη" userId="813aa191-2d4c-464f-9d05-0a7e494d859f" providerId="ADAL" clId="{49C7B61D-1ACF-4AFF-A04E-A3B433E32474}" dt="2026-09-27T19:10:11.412" v="142" actId="27636"/>
+    <pc:docChg chg="custSel delSld modSld">
+      <pc:chgData name="Άριστος Αρέστη" userId="813aa191-2d4c-464f-9d05-0a7e494d859f" providerId="ADAL" clId="{49C7B61D-1ACF-4AFF-A04E-A3B433E32474}" dt="2026-10-01T19:25:17.878" v="143" actId="47"/>
       <pc:docMkLst>
         <pc:docMk/>
       </pc:docMkLst>
@@ -169,14 +160,6 @@
             <ac:picMk id="6" creationId="{253A2219-ED46-C092-9494-61964B3CBA6E}"/>
           </ac:picMkLst>
         </pc:picChg>
-        <pc:picChg chg="del">
-          <ac:chgData name="Άριστος Αρέστη" userId="813aa191-2d4c-464f-9d05-0a7e494d859f" providerId="ADAL" clId="{49C7B61D-1ACF-4AFF-A04E-A3B433E32474}" dt="2026-09-27T19:06:10.992" v="0" actId="478"/>
-          <ac:picMkLst>
-            <pc:docMk/>
-            <pc:sldMk cId="2026847565" sldId="257"/>
-            <ac:picMk id="8" creationId="{00000000-0000-0000-0000-000000000000}"/>
-          </ac:picMkLst>
-        </pc:picChg>
       </pc:sldChg>
       <pc:sldChg chg="modSp mod">
         <pc:chgData name="Άριστος Αρέστη" userId="813aa191-2d4c-464f-9d05-0a7e494d859f" providerId="ADAL" clId="{49C7B61D-1ACF-4AFF-A04E-A3B433E32474}" dt="2026-09-27T19:10:01.092" v="138" actId="27636"/>
@@ -193,20 +176,12 @@
           </ac:spMkLst>
         </pc:spChg>
       </pc:sldChg>
-      <pc:sldChg chg="modSp mod">
-        <pc:chgData name="Άριστος Αρέστη" userId="813aa191-2d4c-464f-9d05-0a7e494d859f" providerId="ADAL" clId="{49C7B61D-1ACF-4AFF-A04E-A3B433E32474}" dt="2026-09-27T19:10:01.092" v="139" actId="27636"/>
+      <pc:sldChg chg="modSp del mod">
+        <pc:chgData name="Άριστος Αρέστη" userId="813aa191-2d4c-464f-9d05-0a7e494d859f" providerId="ADAL" clId="{49C7B61D-1ACF-4AFF-A04E-A3B433E32474}" dt="2026-10-01T19:25:17.878" v="143" actId="47"/>
         <pc:sldMkLst>
           <pc:docMk/>
           <pc:sldMk cId="608684808" sldId="263"/>
         </pc:sldMkLst>
-        <pc:spChg chg="mod">
-          <ac:chgData name="Άριστος Αρέστη" userId="813aa191-2d4c-464f-9d05-0a7e494d859f" providerId="ADAL" clId="{49C7B61D-1ACF-4AFF-A04E-A3B433E32474}" dt="2026-09-27T19:10:01.092" v="139" actId="27636"/>
-          <ac:spMkLst>
-            <pc:docMk/>
-            <pc:sldMk cId="608684808" sldId="263"/>
-            <ac:spMk id="5" creationId="{2E284A61-5B03-4365-9943-863FF495F1D4}"/>
-          </ac:spMkLst>
-        </pc:spChg>
       </pc:sldChg>
     </pc:docChg>
   </pc:docChgLst>
@@ -917,81 +892,6 @@
 </p:notes>
 </file>
 
-<file path=ppt/notesSlides/notesSlide8.xml><?xml version="1.0" encoding="utf-8"?>
-<p:notes xmlns:a="http://schemas.openxmlformats.org/drawingml/2006/main" xmlns:r="http://schemas.openxmlformats.org/officeDocument/2006/relationships" xmlns:p="http://schemas.openxmlformats.org/presentationml/2006/main">
-  <p:cSld>
-    <p:spTree>
-      <p:nvGrpSpPr>
-        <p:cNvPr id="1" name=""/>
-        <p:cNvGrpSpPr/>
-        <p:nvPr/>
-      </p:nvGrpSpPr>
-      <p:grpSpPr>
-        <a:xfrm>
-          <a:off x="0" y="0"/>
-          <a:ext cx="0" cy="0"/>
-          <a:chOff x="0" y="0"/>
-          <a:chExt cx="0" cy="0"/>
-        </a:xfrm>
-      </p:grpSpPr>
-      <p:sp>
-        <p:nvSpPr>
-          <p:cNvPr id="2" name="Slide Image Placeholder 1"/>
-          <p:cNvSpPr>
-            <a:spLocks noGrp="1" noRot="1" noChangeAspect="1"/>
-          </p:cNvSpPr>
-          <p:nvPr>
-            <p:ph type="sldImg"/>
-          </p:nvPr>
-        </p:nvSpPr>
-        <p:spPr/>
-      </p:sp>
-      <p:sp>
-        <p:nvSpPr>
-          <p:cNvPr id="3" name="Notes Placeholder 2"/>
-          <p:cNvSpPr>
-            <a:spLocks noGrp="1"/>
-          </p:cNvSpPr>
-          <p:nvPr>
-            <p:ph type="body" idx="1"/>
-          </p:nvPr>
-        </p:nvSpPr>
-        <p:spPr/>
-        <p:txBody>
-          <a:bodyPr/>
-          <a:lstStyle/>
-          <a:p>
-            <a:endParaRPr/>
-          </a:p>
-        </p:txBody>
-      </p:sp>
-      <p:sp>
-        <p:nvSpPr>
-          <p:cNvPr id="4" name="Slide Number Placeholder 3"/>
-          <p:cNvSpPr>
-            <a:spLocks noGrp="1"/>
-          </p:cNvSpPr>
-          <p:nvPr>
-            <p:ph type="sldNum" idx="5"/>
-          </p:nvPr>
-        </p:nvSpPr>
-        <p:spPr/>
-        <p:txBody>
-          <a:bodyPr/>
-          <a:lstStyle/>
-          <a:p>
-            <a:endParaRPr/>
-          </a:p>
-        </p:txBody>
-      </p:sp>
-    </p:spTree>
-  </p:cSld>
-  <p:clrMapOvr>
-    <a:masterClrMapping/>
-  </p:clrMapOvr>
-</p:notes>
-</file>
-
 <file path=ppt/slideLayouts/slideLayout1.xml><?xml version="1.0" encoding="utf-8"?>
 <p:sldLayout xmlns:a="http://schemas.openxmlformats.org/drawingml/2006/main" xmlns:r="http://schemas.openxmlformats.org/officeDocument/2006/relationships" xmlns:p="http://schemas.openxmlformats.org/presentationml/2006/main" type="title" preserve="1">
   <p:cSld name="Title Slide">
@@ -1137,7 +1037,7 @@
           <a:lstStyle/>
           <a:p>
             <a:fld id="{EDB99004-FBBF-4BCC-9BC3-88F554ADE514}" type="datetimeFigureOut">
-              <a:t>27-Sep-26</a:t>
+              <a:t>01-Oct-26</a:t>
             </a:fld>
             <a:endParaRPr/>
           </a:p>
@@ -1332,7 +1232,7 @@
           <a:lstStyle/>
           <a:p>
             <a:fld id="{EDB99004-FBBF-4BCC-9BC3-88F554ADE514}" type="datetimeFigureOut">
-              <a:t>27-Sep-26</a:t>
+              <a:t>01-Oct-26</a:t>
             </a:fld>
             <a:endParaRPr/>
           </a:p>
@@ -1537,7 +1437,7 @@
           <a:lstStyle/>
           <a:p>
             <a:fld id="{EDB99004-FBBF-4BCC-9BC3-88F554ADE514}" type="datetimeFigureOut">
-              <a:t>27-Sep-26</a:t>
+              <a:t>01-Oct-26</a:t>
             </a:fld>
             <a:endParaRPr/>
           </a:p>
@@ -1732,7 +1632,7 @@
           <a:lstStyle/>
           <a:p>
             <a:fld id="{EDB99004-FBBF-4BCC-9BC3-88F554ADE514}" type="datetimeFigureOut">
-              <a:t>27-Sep-26</a:t>
+              <a:t>01-Oct-26</a:t>
             </a:fld>
             <a:endParaRPr/>
           </a:p>
@@ -2001,7 +1901,7 @@
           <a:lstStyle/>
           <a:p>
             <a:fld id="{EDB99004-FBBF-4BCC-9BC3-88F554ADE514}" type="datetimeFigureOut">
-              <a:t>27-Sep-26</a:t>
+              <a:t>01-Oct-26</a:t>
             </a:fld>
             <a:endParaRPr/>
           </a:p>
@@ -2268,7 +2168,7 @@
           <a:lstStyle/>
           <a:p>
             <a:fld id="{EDB99004-FBBF-4BCC-9BC3-88F554ADE514}" type="datetimeFigureOut">
-              <a:t>27-Sep-26</a:t>
+              <a:t>01-Oct-26</a:t>
             </a:fld>
             <a:endParaRPr/>
           </a:p>
@@ -2684,7 +2584,7 @@
           <a:lstStyle/>
           <a:p>
             <a:fld id="{EDB99004-FBBF-4BCC-9BC3-88F554ADE514}" type="datetimeFigureOut">
-              <a:t>27-Sep-26</a:t>
+              <a:t>01-Oct-26</a:t>
             </a:fld>
             <a:endParaRPr/>
           </a:p>
@@ -2817,7 +2717,7 @@
           <a:lstStyle/>
           <a:p>
             <a:fld id="{EDB99004-FBBF-4BCC-9BC3-88F554ADE514}" type="datetimeFigureOut">
-              <a:t>27-Sep-26</a:t>
+              <a:t>01-Oct-26</a:t>
             </a:fld>
             <a:endParaRPr/>
           </a:p>
@@ -2923,7 +2823,7 @@
           <a:lstStyle/>
           <a:p>
             <a:fld id="{EDB99004-FBBF-4BCC-9BC3-88F554ADE514}" type="datetimeFigureOut">
-              <a:t>27-Sep-26</a:t>
+              <a:t>01-Oct-26</a:t>
             </a:fld>
             <a:endParaRPr/>
           </a:p>
@@ -3242,7 +3142,7 @@
           <a:lstStyle/>
           <a:p>
             <a:fld id="{EDB99004-FBBF-4BCC-9BC3-88F554ADE514}" type="datetimeFigureOut">
-              <a:t>27-Sep-26</a:t>
+              <a:t>01-Oct-26</a:t>
             </a:fld>
             <a:endParaRPr/>
           </a:p>
@@ -3524,7 +3424,7 @@
           <a:lstStyle/>
           <a:p>
             <a:fld id="{EDB99004-FBBF-4BCC-9BC3-88F554ADE514}" type="datetimeFigureOut">
-              <a:t>27-Sep-26</a:t>
+              <a:t>01-Oct-26</a:t>
             </a:fld>
             <a:endParaRPr/>
           </a:p>
@@ -3763,7 +3663,7 @@
           </a:lstStyle>
           <a:p>
             <a:fld id="{EDB99004-FBBF-4BCC-9BC3-88F554ADE514}" type="datetimeFigureOut">
-              <a:t>27-Sep-26</a:t>
+              <a:t>01-Oct-26</a:t>
             </a:fld>
             <a:endParaRPr/>
           </a:p>
@@ -6984,320 +6884,6 @@
   </p:cSld>
   <p:clrMapOvr>
     <a:overrideClrMapping bg1="lt1" tx1="dk1" bg2="lt2" tx2="dk2" accent1="accent1" accent2="accent2" accent3="accent3" accent4="accent4" accent5="accent5" accent6="accent6" hlink="hlink" folHlink="folHlink"/>
-  </p:clrMapOvr>
-</p:sld>
-</file>
-
-<file path=ppt/slides/slide8.xml><?xml version="1.0" encoding="utf-8"?>
-<p:sld xmlns:a="http://schemas.openxmlformats.org/drawingml/2006/main" xmlns:r="http://schemas.openxmlformats.org/officeDocument/2006/relationships" xmlns:p="http://schemas.openxmlformats.org/presentationml/2006/main">
-  <p:cSld>
-    <p:spTree>
-      <p:nvGrpSpPr>
-        <p:cNvPr id="1" name=""/>
-        <p:cNvGrpSpPr/>
-        <p:nvPr/>
-      </p:nvGrpSpPr>
-      <p:grpSpPr>
-        <a:xfrm>
-          <a:off x="0" y="0"/>
-          <a:ext cx="0" cy="0"/>
-          <a:chOff x="0" y="0"/>
-          <a:chExt cx="0" cy="0"/>
-        </a:xfrm>
-      </p:grpSpPr>
-      <p:sp>
-        <p:nvSpPr>
-          <p:cNvPr id="5" name="Rectangle 4">
-            <a:extLst>
-              <a:ext uri="{FF2B5EF4-FFF2-40B4-BE49-F238E27FC236}">
-                <a16:creationId xmlns:a16="http://schemas.microsoft.com/office/drawing/2014/main" id="{2E284A61-5B03-4365-9943-863FF495F1D4}"/>
-              </a:ext>
-            </a:extLst>
-          </p:cNvPr>
-          <p:cNvSpPr>
-            <a:spLocks noGrp="1"/>
-          </p:cNvSpPr>
-          <p:nvPr/>
-        </p:nvSpPr>
-        <p:spPr>
-          <a:xfrm>
-            <a:off x="742950" y="476250"/>
-            <a:ext cx="3905250" cy="857250"/>
-          </a:xfrm>
-          <a:prstGeom prst="rect">
-            <a:avLst/>
-          </a:prstGeom>
-          <a:noFill/>
-          <a:ln w="0">
-            <a:noFill/>
-          </a:ln>
-        </p:spPr>
-        <p:txBody>
-          <a:bodyPr>
-            <a:normAutofit fontScale="85407" lnSpcReduction="20000"/>
-          </a:bodyPr>
-          <a:lstStyle/>
-          <a:p>
-            <a:pPr>
-              <a:defRPr sz="3225" b="0">
-                <a:solidFill>
-                  <a:srgbClr val="6B1E72"/>
-                </a:solidFill>
-                <a:latin typeface="Calibri Light"/>
-                <a:ea typeface="Calibri Light"/>
-                <a:cs typeface="Calibri Light"/>
-              </a:defRPr>
-            </a:pPr>
-            <a:r>
-              <a:rPr sz="3225" b="0">
-                <a:solidFill>
-                  <a:srgbClr val="6B1E72"/>
-                </a:solidFill>
-                <a:latin typeface="Calibri Light"/>
-                <a:ea typeface="Calibri Light"/>
-                <a:cs typeface="Calibri Light"/>
-              </a:rPr>
-              <a:t>Δραστηριότητες Αξιολόγησης</a:t>
-            </a:r>
-          </a:p>
-        </p:txBody>
-      </p:sp>
-      <p:sp>
-        <p:nvSpPr>
-          <p:cNvPr id="2" name="Rectangle 1">
-            <a:extLst>
-              <a:ext uri="{FF2B5EF4-FFF2-40B4-BE49-F238E27FC236}">
-                <a16:creationId xmlns:a16="http://schemas.microsoft.com/office/drawing/2014/main" id="{83ED35FE-1D5E-445C-B32B-7C1959E74E94}"/>
-              </a:ext>
-            </a:extLst>
-          </p:cNvPr>
-          <p:cNvSpPr>
-            <a:spLocks noGrp="1"/>
-          </p:cNvSpPr>
-          <p:nvPr/>
-        </p:nvSpPr>
-        <p:spPr>
-          <a:xfrm>
-            <a:off x="4762500" y="1857375"/>
-            <a:ext cx="6191250" cy="523875"/>
-          </a:xfrm>
-          <a:prstGeom prst="rect">
-            <a:avLst/>
-          </a:prstGeom>
-          <a:noFill/>
-          <a:ln w="0">
-            <a:noFill/>
-          </a:ln>
-        </p:spPr>
-        <p:txBody>
-          <a:bodyPr>
-            <a:normAutofit/>
-          </a:bodyPr>
-          <a:lstStyle/>
-          <a:p>
-            <a:pPr>
-              <a:defRPr sz="2250" b="1">
-                <a:solidFill>
-                  <a:srgbClr val="D84B00"/>
-                </a:solidFill>
-                <a:latin typeface="Arial"/>
-                <a:ea typeface="Arial"/>
-                <a:cs typeface="Arial"/>
-              </a:defRPr>
-            </a:pPr>
-            <a:r>
-              <a:rPr sz="2250" b="1">
-                <a:solidFill>
-                  <a:srgbClr val="D84B00"/>
-                </a:solidFill>
-                <a:latin typeface="Arial"/>
-                <a:ea typeface="Arial"/>
-                <a:cs typeface="Arial"/>
-              </a:rPr>
-              <a:t>Φύλλο Εργασίας Β.4.1.M6</a:t>
-            </a:r>
-          </a:p>
-        </p:txBody>
-      </p:sp>
-      <p:sp>
-        <p:nvSpPr>
-          <p:cNvPr id="3" name="Rectangle 2">
-            <a:extLst>
-              <a:ext uri="{FF2B5EF4-FFF2-40B4-BE49-F238E27FC236}">
-                <a16:creationId xmlns:a16="http://schemas.microsoft.com/office/drawing/2014/main" id="{F554F7CE-DB69-4D50-83D2-04526EFBB762}"/>
-              </a:ext>
-            </a:extLst>
-          </p:cNvPr>
-          <p:cNvSpPr>
-            <a:spLocks noGrp="1"/>
-          </p:cNvSpPr>
-          <p:nvPr/>
-        </p:nvSpPr>
-        <p:spPr>
-          <a:xfrm>
-            <a:off x="4762500" y="2857500"/>
-            <a:ext cx="6191250" cy="1714500"/>
-          </a:xfrm>
-          <a:prstGeom prst="rect">
-            <a:avLst/>
-          </a:prstGeom>
-          <a:noFill/>
-          <a:ln w="0">
-            <a:noFill/>
-          </a:ln>
-        </p:spPr>
-        <p:txBody>
-          <a:bodyPr>
-            <a:normAutofit/>
-          </a:bodyPr>
-          <a:lstStyle/>
-          <a:p>
-            <a:pPr>
-              <a:defRPr sz="2250" b="0">
-                <a:solidFill>
-                  <a:srgbClr val="151515"/>
-                </a:solidFill>
-                <a:latin typeface="Arial"/>
-                <a:ea typeface="Arial"/>
-                <a:cs typeface="Arial"/>
-              </a:defRPr>
-            </a:pPr>
-            <a:r>
-              <a:rPr sz="2250" b="0">
-                <a:solidFill>
-                  <a:srgbClr val="151515"/>
-                </a:solidFill>
-                <a:latin typeface="Arial"/>
-                <a:ea typeface="Arial"/>
-                <a:cs typeface="Arial"/>
-              </a:rPr>
-              <a:t>Σελίδα 32</a:t>
-            </a:r>
-          </a:p>
-          <a:p>
-            <a:pPr>
-              <a:defRPr sz="2250" b="0">
-                <a:solidFill>
-                  <a:srgbClr val="151515"/>
-                </a:solidFill>
-                <a:latin typeface="Arial"/>
-                <a:ea typeface="Arial"/>
-                <a:cs typeface="Arial"/>
-              </a:defRPr>
-            </a:pPr>
-            <a:r>
-              <a:rPr sz="2250" b="0">
-                <a:solidFill>
-                  <a:srgbClr val="151515"/>
-                </a:solidFill>
-                <a:latin typeface="Arial"/>
-                <a:ea typeface="Arial"/>
-                <a:cs typeface="Arial"/>
-              </a:rPr>
-              <a:t>Ασκήσεις 13–24</a:t>
-            </a:r>
-          </a:p>
-          <a:p>
-            <a:endParaRPr sz="2250" b="0">
-              <a:solidFill>
-                <a:srgbClr val="151515"/>
-              </a:solidFill>
-              <a:latin typeface="Arial"/>
-              <a:ea typeface="Arial"/>
-              <a:cs typeface="Arial"/>
-            </a:endParaRPr>
-          </a:p>
-          <a:p>
-            <a:pPr>
-              <a:defRPr sz="2250" b="0">
-                <a:solidFill>
-                  <a:srgbClr val="151515"/>
-                </a:solidFill>
-                <a:latin typeface="Arial"/>
-                <a:ea typeface="Arial"/>
-                <a:cs typeface="Arial"/>
-              </a:defRPr>
-            </a:pPr>
-            <a:r>
-              <a:rPr sz="2250" b="0">
-                <a:solidFill>
-                  <a:srgbClr val="151515"/>
-                </a:solidFill>
-                <a:latin typeface="Arial"/>
-                <a:ea typeface="Arial"/>
-                <a:cs typeface="Arial"/>
-              </a:rPr>
-              <a:t>Αρχείο: Κέρδος.xlsx</a:t>
-            </a:r>
-          </a:p>
-        </p:txBody>
-      </p:sp>
-      <p:sp>
-        <p:nvSpPr>
-          <p:cNvPr id="4" name="Rectangle 3">
-            <a:extLst>
-              <a:ext uri="{FF2B5EF4-FFF2-40B4-BE49-F238E27FC236}">
-                <a16:creationId xmlns:a16="http://schemas.microsoft.com/office/drawing/2014/main" id="{0606282F-BE8E-4E51-B22A-EF5BB5E568D1}"/>
-              </a:ext>
-            </a:extLst>
-          </p:cNvPr>
-          <p:cNvSpPr>
-            <a:spLocks noGrp="1"/>
-          </p:cNvSpPr>
-          <p:nvPr/>
-        </p:nvSpPr>
-        <p:spPr>
-          <a:xfrm>
-            <a:off x="4762500" y="5000625"/>
-            <a:ext cx="6191250" cy="857250"/>
-          </a:xfrm>
-          <a:prstGeom prst="rect">
-            <a:avLst/>
-          </a:prstGeom>
-          <a:noFill/>
-          <a:ln w="0">
-            <a:noFill/>
-          </a:ln>
-        </p:spPr>
-        <p:txBody>
-          <a:bodyPr>
-            <a:normAutofit/>
-          </a:bodyPr>
-          <a:lstStyle/>
-          <a:p>
-            <a:pPr>
-              <a:defRPr sz="1800" b="0">
-                <a:solidFill>
-                  <a:srgbClr val="6B1E72"/>
-                </a:solidFill>
-                <a:latin typeface="Arial"/>
-                <a:ea typeface="Arial"/>
-                <a:cs typeface="Arial"/>
-              </a:defRPr>
-            </a:pPr>
-            <a:r>
-              <a:rPr sz="1800" b="0">
-                <a:solidFill>
-                  <a:srgbClr val="6B1E72"/>
-                </a:solidFill>
-                <a:latin typeface="Arial"/>
-                <a:ea typeface="Arial"/>
-                <a:cs typeface="Arial"/>
-              </a:rPr>
-              <a:t>Οργάνωσε τα φύλλα και ολοκλήρωσε τις αλλαγές στο αντίγραφο του αρχείου.</a:t>
-            </a:r>
-          </a:p>
-        </p:txBody>
-      </p:sp>
-    </p:spTree>
-    <p:extLst>
-      <p:ext uri="{BB962C8B-B14F-4D97-AF65-F5344CB8AC3E}">
-        <p14:creationId xmlns:p14="http://schemas.microsoft.com/office/powerpoint/2010/main" val="608684808"/>
-      </p:ext>
-    </p:extLst>
-  </p:cSld>
-  <p:clrMapOvr>
-    <a:masterClrMapping/>
   </p:clrMapOvr>
 </p:sld>
 </file>
